--- a/_w2_report/proposal.pptx
+++ b/_w2_report/proposal.pptx
@@ -5870,45 +5870,6 @@
         </p:nvSpPr>
         <p:spPr>
           <a:xfrm>
-            <a:off x="457200" y="5760720"/>
-            <a:ext cx="8229600" cy="274320"/>
-          </a:xfrm>
-          <a:prstGeom prst="rect">
-            <a:avLst/>
-          </a:prstGeom>
-          <a:noFill/>
-          <a:ln/>
-        </p:spPr>
-        <p:txBody>
-          <a:bodyPr wrap="square" rtlCol="0" anchor="ctr"/>
-          <a:lstStyle/>
-          <a:p>
-            <a:pPr algn="l" indent="0" marL="0">
-              <a:buNone/>
-            </a:pPr>
-            <a:r>
-              <a:rPr lang="en-US" sz="1100" i="1" dirty="0">
-                <a:solidFill>
-                  <a:srgbClr val="5A6B8C"/>
-                </a:solidFill>
-                <a:latin typeface="Calibri" pitchFamily="34" charset="0"/>
-                <a:ea typeface="Calibri" pitchFamily="34" charset="-122"/>
-                <a:cs typeface="Calibri" pitchFamily="34" charset="-120"/>
-              </a:rPr>
-              <a:t>已剔除伪造的联邦学习代码（PPT 不讲联邦学习，避免答辩翻车）</a:t>
-            </a:r>
-            <a:endParaRPr lang="en-US" sz="1100" dirty="0"/>
-          </a:p>
-        </p:txBody>
-      </p:sp>
-      <p:sp>
-        <p:nvSpPr>
-          <p:cNvPr id="25" name="Text 23"/>
-          <p:cNvSpPr/>
-          <p:nvPr/>
-        </p:nvSpPr>
-        <p:spPr>
-          <a:xfrm>
             <a:off x="457200" y="6035040"/>
             <a:ext cx="8229600" cy="274320"/>
           </a:xfrm>
@@ -9680,23 +9641,6 @@
                 <a:cs typeface="Calibri" pitchFamily="34" charset="-120"/>
               </a:rPr>
               <a:t>供应商信用评分：活跃度 30% + 中标率 40% + 偏离度 30% 加权</a:t>
-            </a:r>
-            <a:endParaRPr lang="en-US" sz="1300" dirty="0"/>
-          </a:p>
-          <a:p>
-            <a:pPr algn="l" indent="0" marL="0">
-              <a:buNone/>
-            </a:pPr>
-            <a:r>
-              <a:rPr lang="en-US" sz="1300" dirty="0">
-                <a:solidFill>
-                  <a:srgbClr val="1E2761"/>
-                </a:solidFill>
-                <a:latin typeface="Calibri" pitchFamily="34" charset="0"/>
-                <a:ea typeface="Calibri" pitchFamily="34" charset="-122"/>
-                <a:cs typeface="Calibri" pitchFamily="34" charset="-120"/>
-              </a:rPr>
-              <a:t>已剔除伪造联邦学习代码</a:t>
             </a:r>
             <a:endParaRPr lang="en-US" sz="1300" dirty="0"/>
           </a:p>
@@ -14216,7 +14160,7 @@
                 <a:ea typeface="Calibri" pitchFamily="34" charset="-122"/>
                 <a:cs typeface="Calibri" pitchFamily="34" charset="-120"/>
               </a:rPr>
-              <a:t>recall 66.99%  ·  precision 61.98%  ·  iou_avg 0.5962  ·  iou_avg_matched 0.8876  ·  P50/P95=1.0</a:t>
+              <a:t>recall 69.90%  ·  precision 60.63%  ·  iou_avg 0.5307  ·  P50=0.96/P95=1.0</a:t>
             </a:r>
             <a:endParaRPr lang="en-US" sz="1300" dirty="0"/>
           </a:p>
@@ -15261,7 +15205,7 @@
                 <a:ea typeface="Calibri" pitchFamily="34" charset="-122"/>
                 <a:cs typeface="Calibri" pitchFamily="34" charset="-120"/>
               </a:rPr>
-              <a:t>LLM 语义缓存用 TTLCache 防 memory leak</a:t>
+              <a:t>LLM 语义缓存用 dict+TTL+LRU 防 memory leak</a:t>
             </a:r>
             <a:endParaRPr lang="en-US" sz="1100" dirty="0"/>
           </a:p>
@@ -17691,7 +17635,7 @@
                 <a:ea typeface="Calibri" pitchFamily="34" charset="-122"/>
                 <a:cs typeface="Calibri" pitchFamily="34" charset="-120"/>
               </a:rPr>
-              <a:t>IoU 0.89 边界质量</a:t>
+              <a:t>IoU 0.5307 边界质量</a:t>
             </a:r>
             <a:endParaRPr lang="en-US" sz="1100" dirty="0"/>
           </a:p>

--- a/_w2_report/proposal.pptx
+++ b/_w2_report/proposal.pptx
@@ -8668,7 +8668,7 @@
                 <a:ea typeface="Calibri" pitchFamily="34" charset="-122"/>
                 <a:cs typeface="Calibri" pitchFamily="34" charset="-120"/>
               </a:rPr>
-              <a:t>A(100%) → C(2.91%)</a:t>
+              <a:t>A(100%) → C(1.94%)</a:t>
             </a:r>
             <a:endParaRPr lang="en-US" sz="1400" dirty="0"/>
           </a:p>
@@ -11692,7 +11692,7 @@
                 <a:ea typeface="Calibri" pitchFamily="34" charset="-122"/>
                 <a:cs typeface="Calibri" pitchFamily="34" charset="-120"/>
               </a:rPr>
-              <a:t>571</a:t>
+              <a:t>609</a:t>
             </a:r>
             <a:endParaRPr lang="en-US" sz="10000" dirty="0"/>
           </a:p>
@@ -11731,7 +11731,7 @@
                 <a:ea typeface="Calibri" pitchFamily="34" charset="-122"/>
                 <a:cs typeface="Calibri" pitchFamily="34" charset="-120"/>
               </a:rPr>
-              <a:t>项测试全部通过</a:t>
+              <a:t>项测试通过 · 1 项跳过</a:t>
             </a:r>
             <a:endParaRPr lang="en-US" sz="1800" dirty="0"/>
           </a:p>
@@ -12187,7 +12187,7 @@
                 <a:ea typeface="Calibri" pitchFamily="34" charset="-122"/>
                 <a:cs typeface="Calibri" pitchFamily="34" charset="-120"/>
               </a:rPr>
-              <a:t>extractor.py 覆盖率 100%</a:t>
+              <a:t>extractor.py 覆盖率 98%</a:t>
             </a:r>
             <a:endParaRPr lang="en-US" sz="1800" dirty="0"/>
           </a:p>
@@ -12226,7 +12226,7 @@
                 <a:ea typeface="Calibri" pitchFamily="34" charset="-122"/>
                 <a:cs typeface="Calibri" pitchFamily="34" charset="-120"/>
               </a:rPr>
-              <a:t>evidence_locator / field_validator / normalizer 全部 95%+</a:t>
+              <a:t>evidence_locator / field_validator / normalizer 88-99%</a:t>
             </a:r>
             <a:endParaRPr lang="en-US" sz="1400" dirty="0"/>
           </a:p>
@@ -13472,7 +13472,7 @@
                           <a:ea typeface="Calibri" pitchFamily="34" charset="-122"/>
                           <a:cs typeface="Calibri" pitchFamily="34" charset="-120"/>
                         </a:rPr>
-                        <a:t>2.91%</a:t>
+                        <a:t>1.94%</a:t>
                       </a:r>
                       <a:endParaRPr lang="en-US" sz="1200" dirty="0">
                         <a:latin typeface="Calibri" charset="0"/>
@@ -13604,7 +13604,7 @@
                           <a:ea typeface="Calibri" pitchFamily="34" charset="-122"/>
                           <a:cs typeface="Calibri" pitchFamily="34" charset="-120"/>
                         </a:rPr>
-                        <a:t>92.13%</a:t>
+                        <a:t>93.70%</a:t>
                       </a:r>
                       <a:endParaRPr lang="en-US" sz="1200" dirty="0">
                         <a:latin typeface="Calibri" charset="0"/>
@@ -13669,7 +13669,7 @@
                           <a:ea typeface="Calibri" pitchFamily="34" charset="-122"/>
                           <a:cs typeface="Calibri" pitchFamily="34" charset="-120"/>
                         </a:rPr>
-                        <a:t>91.34%</a:t>
+                        <a:t>93.70%</a:t>
                       </a:r>
                       <a:endParaRPr lang="en-US" sz="1200" dirty="0">
                         <a:latin typeface="Calibri" charset="0"/>
@@ -13734,7 +13734,7 @@
                           <a:ea typeface="Calibri" pitchFamily="34" charset="-122"/>
                           <a:cs typeface="Calibri" pitchFamily="34" charset="-120"/>
                         </a:rPr>
-                        <a:t>88.98%</a:t>
+                        <a:t>94.49%</a:t>
                       </a:r>
                       <a:endParaRPr lang="en-US" sz="1200" dirty="0">
                         <a:latin typeface="Calibri" charset="0"/>
@@ -14082,7 +14082,7 @@
                 <a:ea typeface="Calibri" pitchFamily="34" charset="-122"/>
                 <a:cs typeface="Calibri" pitchFamily="34" charset="-120"/>
               </a:rPr>
-              <a:t>结论：unjustified_rate A(100%) → C(2.91%)，证据验证显著抑制无依据输出</a:t>
+              <a:t>结论：unjustified_rate A(100%) → C(1.94%)，证据验证显著抑制无依据输出</a:t>
             </a:r>
             <a:endParaRPr lang="en-US" sz="1400" dirty="0"/>
           </a:p>

--- a/_w2_report/proposal.pptx
+++ b/_w2_report/proposal.pptx
@@ -11692,7 +11692,7 @@
                 <a:ea typeface="Calibri" pitchFamily="34" charset="-122"/>
                 <a:cs typeface="Calibri" pitchFamily="34" charset="-120"/>
               </a:rPr>
-              <a:t>609</a:t>
+              <a:t>571</a:t>
             </a:r>
             <a:endParaRPr lang="en-US" sz="10000" dirty="0"/>
           </a:p>

--- a/_w2_report/proposal.pptx
+++ b/_w2_report/proposal.pptx
@@ -3213,7 +3213,7 @@
                 <a:ea typeface="Calibri" pitchFamily="34" charset="-122"/>
                 <a:cs typeface="Calibri" pitchFamily="34" charset="-120"/>
               </a:rPr>
-              <a:t>为供应链金融机构提供招投标数据聚合与供应商信用评分 API 的 AI Agent 应用</a:t>
+              <a:t>为供应链金融机构提供招投标数据聚合与供应商公开活动观察度 API 的 AI Agent 应用</a:t>
             </a:r>
             <a:endParaRPr lang="en-US" sz="1600" dirty="0"/>
           </a:p>
@@ -5631,7 +5631,7 @@
                 <a:ea typeface="Calibri" pitchFamily="34" charset="-122"/>
                 <a:cs typeface="Calibri" pitchFamily="34" charset="-120"/>
               </a:rPr>
-              <a:t>BOQ 报价异常检测</a:t>
+              <a:t>BOQ 报价异常检测（实验性）</a:t>
             </a:r>
             <a:endParaRPr lang="en-US" sz="1500" dirty="0"/>
           </a:p>
@@ -6073,7 +6073,7 @@
                 <a:ea typeface="Calibri" pitchFamily="34" charset="-122"/>
                 <a:cs typeface="Calibri" pitchFamily="34" charset="-120"/>
               </a:rPr>
-              <a:t>供应商信用评分</a:t>
+              <a:t>供应商公开活动观察度</a:t>
             </a:r>
             <a:endParaRPr lang="en-US" sz="1500" dirty="0"/>
           </a:p>
@@ -7312,7 +7312,7 @@
                 <a:ea typeface="Calibri" pitchFamily="34" charset="-122"/>
                 <a:cs typeface="Calibri" pitchFamily="34" charset="-120"/>
               </a:rPr>
-              <a:t>BOQ 异常 + 废标风险 + 信用评分</a:t>
+              <a:t>BOQ 异常（实验性）+ 废标风险 + 公开活动观察度</a:t>
             </a:r>
             <a:endParaRPr lang="en-US" sz="1100" dirty="0"/>
           </a:p>
@@ -7523,7 +7523,7 @@
                   <a:srgbClr val="1E2761"/>
                 </a:solidFill>
               </a:rPr>
-              <a:t>价值量化：人工跨平台尽调 2-4 小时 → 标小智 3 分钟 · 字段抽取 IoU 0.5339 · 无依据字段率 100%→0% · LLM 成本 ¥1.99/99 篇</a:t>
+              <a:t>价值量化：人工跨平台尽调 2-4 小时 → 标小智 3 分钟 · 字段抽取 IoU 0.5339 · 无依据字段率 100%→0% · LLM 成本 ¥1.99/107 篇</a:t>
             </a:r>
           </a:p>
         </p:txBody>
@@ -8935,7 +8935,7 @@
                 <a:ea typeface="Calibri" pitchFamily="34" charset="-122"/>
                 <a:cs typeface="Calibri" pitchFamily="34" charset="-120"/>
               </a:rPr>
-              <a:t>IoU 边界质量评测 + A/B/C/D 四组消融实验（99 篇金标）</a:t>
+              <a:t>IoU 边界质量评测 + A/B/C/D 四组消融实验（22 篇金标）</a:t>
             </a:r>
             <a:endParaRPr lang="en-US" sz="1300" dirty="0"/>
           </a:p>
@@ -9154,7 +9154,7 @@
                 <a:ea typeface="Calibri" pitchFamily="34" charset="-122"/>
                 <a:cs typeface="Calibri" pitchFamily="34" charset="-120"/>
               </a:rPr>
-              <a:t>04 · T4 BOQ 异常检测</a:t>
+              <a:t>04 · T4 BOQ 异常检测（实验性）</a:t>
             </a:r>
             <a:endParaRPr lang="en-US" sz="3200" dirty="0"/>
           </a:p>
@@ -9680,7 +9680,7 @@
                 <a:ea typeface="Calibri" pitchFamily="34" charset="-122"/>
                 <a:cs typeface="Calibri" pitchFamily="34" charset="-120"/>
               </a:rPr>
-              <a:t>04 · T5 废标风险预警 + 供应商信用评分</a:t>
+              <a:t>04 · T5 废标风险预警 + 供应商公开活动观察度</a:t>
             </a:r>
             <a:endParaRPr lang="en-US" sz="3200" dirty="0"/>
           </a:p>
@@ -9970,7 +9970,7 @@
                 <a:ea typeface="Calibri" pitchFamily="34" charset="-122"/>
                 <a:cs typeface="Calibri" pitchFamily="34" charset="-120"/>
               </a:rPr>
-              <a:t>供应商信用评分：集中度 25% + 金额 20% + 频率 20% + 地域 15% + 采购人 20% 加权</a:t>
+              <a:t>供应商公开活动观察度：集中度 25% + 金额 20% + 频率 20% + 地域 15% + 采购人 20% 加权</a:t>
             </a:r>
             <a:endParaRPr lang="en-US" sz="1300" dirty="0"/>
           </a:p>
@@ -12390,7 +12390,7 @@
                   <a:srgbClr val="1976D2"/>
                 </a:solidFill>
               </a:rPr>
-              <a:t>LLM 成本：deepseek-v4-flash · 133 万 tokens · ¥1.99 · 99 篇公告 × 6 字段批量抽取</a:t>
+              <a:t>LLM 成本：deepseek-v4-flash · 133 万 tokens · ¥1.99 · 107 篇公告 × 6 字段批量抽取</a:t>
             </a:r>
           </a:p>
         </p:txBody>
@@ -12706,7 +12706,7 @@
           </a:p>
           <a:p>
             <a:r>
-              <a:t>99 篇公告 × 6 字段批量抽取</a:t>
+              <a:t>107 篇公告 × 6 字段批量抽取</a:t>
             </a:r>
           </a:p>
           <a:p>
@@ -12870,7 +12870,7 @@
                   <a:srgbClr val="999999"/>
                 </a:solidFill>
               </a:rPr>
-              <a:t>成本可复现：deepseek-v4-flash · 133 万 tokens · ¥1.99 · 99 篇公告 × 6 字段批量抽取</a:t>
+              <a:t>成本可复现：deepseek-v4-flash · 133 万 tokens · ¥1.99 · 107 篇公告 × 6 字段批量抽取</a:t>
             </a:r>
           </a:p>
         </p:txBody>
@@ -17197,7 +17197,7 @@
                 <a:ea typeface="Calibri" pitchFamily="34" charset="-122"/>
                 <a:cs typeface="Calibri" pitchFamily="34" charset="-120"/>
               </a:rPr>
-              <a:t>BOQ 基准价格库</a:t>
+              <a:t>BOQ 基准价格库（实验性）</a:t>
             </a:r>
             <a:endParaRPr lang="en-US" sz="1400" dirty="0"/>
           </a:p>
@@ -17610,7 +17610,7 @@
                 <a:ea typeface="Calibri" pitchFamily="34" charset="-122"/>
                 <a:cs typeface="Calibri" pitchFamily="34" charset="-120"/>
               </a:rPr>
-              <a:t>开源协议：Apache License 2.0 | GitHub 已公开，含完整安装文档 + 826 项测试用例 + 99 篇金标数据，可复现</a:t>
+              <a:t>开源协议：Apache License 2.0 | GitHub 已公开，含完整安装文档 + 826 项测试用例 + 22 篇金标数据，可复现</a:t>
             </a:r>
             <a:endParaRPr lang="en-US" sz="1300" dirty="0"/>
           </a:p>
@@ -17870,7 +17870,7 @@
                 <a:ea typeface="Calibri" pitchFamily="34" charset="-122"/>
                 <a:cs typeface="Calibri" pitchFamily="34" charset="-120"/>
               </a:rPr>
-              <a:t>智汇标讯 · AI+金融</a:t>
+              <a:t>标小智 · AI+金融</a:t>
             </a:r>
             <a:endParaRPr lang="en-US" sz="1800" dirty="0"/>
           </a:p>
@@ -20212,7 +20212,7 @@
                   <a:srgbClr val="7B1FA2"/>
                 </a:solidFill>
               </a:rPr>
-              <a:t>→ 标小智：供应商信用评分 + 行为图谱</a:t>
+              <a:t>→ 标小智：供应商公开活动观察度 + 行为图谱</a:t>
             </a:r>
           </a:p>
         </p:txBody>
@@ -23967,7 +23967,7 @@
                 <a:ea typeface="Calibri" pitchFamily="34" charset="-122"/>
                 <a:cs typeface="Calibri" pitchFamily="34" charset="-120"/>
               </a:rPr>
-              <a:t>BOQ 报价异常检测</a:t>
+              <a:t>BOQ 报价异常检测（实验性）</a:t>
             </a:r>
             <a:endParaRPr lang="en-US" sz="1400" dirty="0"/>
           </a:p>
@@ -24259,7 +24259,7 @@
                 <a:ea typeface="Calibri" pitchFamily="34" charset="-122"/>
                 <a:cs typeface="Calibri" pitchFamily="34" charset="-120"/>
               </a:rPr>
-              <a:t>供应商信用评分</a:t>
+              <a:t>供应商公开活动观察度</a:t>
             </a:r>
             <a:endParaRPr lang="en-US" sz="1400" dirty="0"/>
           </a:p>
@@ -25293,7 +25293,7 @@
                 <a:ea typeface="Calibri" pitchFamily="34" charset="-122"/>
                 <a:cs typeface="Calibri" pitchFamily="34" charset="-120"/>
               </a:rPr>
-              <a:t>BOQ + 废标 + 信用评分</a:t>
+              <a:t>BOQ（实验性）+ 废标 + 公开活动观察度</a:t>
             </a:r>
             <a:endParaRPr lang="en-US" sz="1200" dirty="0"/>
           </a:p>

--- a/_w2_report/proposal.pptx
+++ b/_w2_report/proposal.pptx
@@ -5631,7 +5631,7 @@
                 <a:ea typeface="Calibri" pitchFamily="34" charset="-122"/>
                 <a:cs typeface="Calibri" pitchFamily="34" charset="-120"/>
               </a:rPr>
-              <a:t>BOQ 报价异常检测（实验性）</a:t>
+              <a:t>六维公开活动观察信号</a:t>
             </a:r>
             <a:endParaRPr lang="en-US" sz="1500" dirty="0"/>
           </a:p>
@@ -5670,7 +5670,7 @@
                 <a:ea typeface="Calibri" pitchFamily="34" charset="-122"/>
                 <a:cs typeface="Calibri" pitchFamily="34" charset="-120"/>
               </a:rPr>
-              <a:t>32 类基准价格库</a:t>
+              <a:t>中标活跃度/集中度/废标关联</a:t>
             </a:r>
             <a:endParaRPr lang="en-US" sz="1200" dirty="0"/>
           </a:p>
@@ -5687,7 +5687,7 @@
                 <a:ea typeface="Calibri" pitchFamily="34" charset="-122"/>
                 <a:cs typeface="Calibri" pitchFamily="34" charset="-120"/>
               </a:rPr>
-              <a:t>正则提取 + 市场均价 ±std 判定</a:t>
+              <a:t>明确投标否决/信息冲突/高频共现</a:t>
             </a:r>
             <a:endParaRPr lang="en-US" sz="1200" dirty="0"/>
           </a:p>
@@ -5704,7 +5704,7 @@
                 <a:ea typeface="Calibri" pitchFamily="34" charset="-122"/>
                 <a:cs typeface="Calibri" pitchFamily="34" charset="-120"/>
               </a:rPr>
-              <a:t>underpriced/overpriced/normal</a:t>
+              <a:t>不直接归因，仅供人工尽调参考</a:t>
             </a:r>
             <a:endParaRPr lang="en-US" sz="1200" dirty="0"/>
           </a:p>
@@ -5743,7 +5743,7 @@
                 <a:ea typeface="Calibri" pitchFamily="34" charset="-122"/>
                 <a:cs typeface="Calibri" pitchFamily="34" charset="-120"/>
               </a:rPr>
-              <a:t>32 类</a:t>
+              <a:t>6 维</a:t>
             </a:r>
             <a:endParaRPr lang="en-US" sz="2800" dirty="0"/>
           </a:p>
@@ -5782,7 +5782,7 @@
                 <a:ea typeface="Calibri" pitchFamily="34" charset="-122"/>
                 <a:cs typeface="Calibri" pitchFamily="34" charset="-120"/>
               </a:rPr>
-              <a:t>基准品类</a:t>
+              <a:t>观察信号</a:t>
             </a:r>
             <a:endParaRPr lang="en-US" sz="1100" dirty="0"/>
           </a:p>
@@ -5852,7 +5852,7 @@
                 <a:ea typeface="Calibri" pitchFamily="34" charset="-122"/>
                 <a:cs typeface="Calibri" pitchFamily="34" charset="-120"/>
               </a:rPr>
-              <a:t>废标风险预警</a:t>
+              <a:t>来源谱系追踪</a:t>
             </a:r>
             <a:endParaRPr lang="en-US" sz="1500" dirty="0"/>
           </a:p>
@@ -5891,7 +5891,7 @@
                 <a:ea typeface="Calibri" pitchFamily="34" charset="-122"/>
                 <a:cs typeface="Calibri" pitchFamily="34" charset="-120"/>
               </a:rPr>
-              <a:t>18 条规则覆盖</a:t>
+              <a:t>区分官方原始/转载/商业转载/索引</a:t>
             </a:r>
             <a:endParaRPr lang="en-US" sz="1200" dirty="0"/>
           </a:p>
@@ -5908,7 +5908,7 @@
                 <a:ea typeface="Calibri" pitchFamily="34" charset="-122"/>
                 <a:cs typeface="Calibri" pitchFamily="34" charset="-120"/>
               </a:rPr>
-              <a:t>排他性资质/付款风险/交货期/资质门槛</a:t>
+              <a:t>识别同源转载，避免误判独立交叉验证</a:t>
             </a:r>
             <a:endParaRPr lang="en-US" sz="1200" dirty="0"/>
           </a:p>
@@ -5925,7 +5925,7 @@
                 <a:ea typeface="Calibri" pitchFamily="34" charset="-122"/>
                 <a:cs typeface="Calibri" pitchFamily="34" charset="-120"/>
               </a:rPr>
-              <a:t>含否定语境检测</a:t>
+              <a:t>基于事实断言键确保跨源比较同一业务事实</a:t>
             </a:r>
             <a:endParaRPr lang="en-US" sz="1200" dirty="0"/>
           </a:p>
@@ -5964,7 +5964,7 @@
                 <a:ea typeface="Calibri" pitchFamily="34" charset="-122"/>
                 <a:cs typeface="Calibri" pitchFamily="34" charset="-120"/>
               </a:rPr>
-              <a:t>18 条</a:t>
+              <a:t>4 类</a:t>
             </a:r>
             <a:endParaRPr lang="en-US" sz="2800" dirty="0"/>
           </a:p>
@@ -6003,7 +6003,7 @@
                 <a:ea typeface="Calibri" pitchFamily="34" charset="-122"/>
                 <a:cs typeface="Calibri" pitchFamily="34" charset="-120"/>
               </a:rPr>
-              <a:t>风险规则</a:t>
+              <a:t>来源质量</a:t>
             </a:r>
             <a:endParaRPr lang="en-US" sz="1100" dirty="0"/>
           </a:p>
@@ -6073,7 +6073,7 @@
                 <a:ea typeface="Calibri" pitchFamily="34" charset="-122"/>
                 <a:cs typeface="Calibri" pitchFamily="34" charset="-120"/>
               </a:rPr>
-              <a:t>供应商公开活动观察度</a:t>
+              <a:t>凭证安全（v4.1 §13.1）</a:t>
             </a:r>
             <a:endParaRPr lang="en-US" sz="1500" dirty="0"/>
           </a:p>
@@ -6112,7 +6112,7 @@
                 <a:ea typeface="Calibri" pitchFamily="34" charset="-122"/>
                 <a:cs typeface="Calibri" pitchFamily="34" charset="-120"/>
               </a:rPr>
-              <a:t>五维度加权（25/20/20/15/20）评分</a:t>
+              <a:t>HMAC-SHA256 API Key + Argon2id 密码 + AES-GCM Cookie</a:t>
             </a:r>
             <a:endParaRPr lang="en-US" sz="1200" dirty="0"/>
           </a:p>
@@ -6129,7 +6129,7 @@
                 <a:ea typeface="Calibri" pitchFamily="34" charset="-122"/>
                 <a:cs typeface="Calibri" pitchFamily="34" charset="-120"/>
               </a:rPr>
-              <a:t>集中度 25% + 金额 20% + 频率 20% + 地域 15% + 采购人 20%</a:t>
+              <a:t>高熵随机值 + 服务端密钥 + nonce 唯一 + 日志不记录凭证</a:t>
             </a:r>
             <a:endParaRPr lang="en-US" sz="1200" dirty="0"/>
           </a:p>
@@ -6146,7 +6146,7 @@
                 <a:ea typeface="Calibri" pitchFamily="34" charset="-122"/>
                 <a:cs typeface="Calibri" pitchFamily="34" charset="-120"/>
               </a:rPr>
-              <a:t>输出 SupplierRiskReport</a:t>
+              <a:t>45 个单元测试，分支覆盖率 100%</a:t>
             </a:r>
             <a:endParaRPr lang="en-US" sz="1200" dirty="0"/>
           </a:p>
@@ -6159,7 +6159,7 @@
                 </a:solidFill>
                 <a:latin typeface="Calibri"/>
               </a:rPr>
-              <a:t>权重来源：AHP 层次分析法导出，CR=0.0116&lt;0.1</a:t>
+              <a:t>已实现：credentials.py + url_safety.py</a:t>
             </a:r>
           </a:p>
         </p:txBody>
@@ -6197,7 +6197,7 @@
                 <a:ea typeface="Calibri" pitchFamily="34" charset="-122"/>
                 <a:cs typeface="Calibri" pitchFamily="34" charset="-120"/>
               </a:rPr>
-              <a:t>25/20/20/15/20</a:t>
+              <a:t>HMAC+Argon2id+AES-GCM</a:t>
             </a:r>
             <a:endParaRPr lang="en-US" sz="2800" dirty="0"/>
           </a:p>
@@ -6236,7 +6236,7 @@
                 <a:ea typeface="Calibri" pitchFamily="34" charset="-122"/>
                 <a:cs typeface="Calibri" pitchFamily="34" charset="-120"/>
               </a:rPr>
-              <a:t>权重分配</a:t>
+              <a:t>凭证安全</a:t>
             </a:r>
             <a:endParaRPr lang="en-US" sz="1100" dirty="0"/>
           </a:p>
@@ -6275,7 +6275,7 @@
                 <a:ea typeface="Consolas" pitchFamily="34" charset="-122"/>
                 <a:cs typeface="Consolas" pitchFamily="34" charset="-120"/>
               </a:rPr>
-              <a:t>代码：app/agents/finance_agent.py + app/processors/{boq_engine,risk_engine,supplier_risk}.py</a:t>
+              <a:t>代码：app/utils/credentials.py + app/core/{rate_limiter,robots_checker,source_whitelist}.py + app/services/data_deletion.py</a:t>
             </a:r>
             <a:endParaRPr lang="en-US" sz="1100" dirty="0"/>
           </a:p>
@@ -7312,7 +7312,7 @@
                 <a:ea typeface="Calibri" pitchFamily="34" charset="-122"/>
                 <a:cs typeface="Calibri" pitchFamily="34" charset="-120"/>
               </a:rPr>
-              <a:t>BOQ 异常（实验性）+ 废标风险 + 公开活动观察度</a:t>
+              <a:t>六维公开活动观察信号（不输出信用评分）</a:t>
             </a:r>
             <a:endParaRPr lang="en-US" sz="1100" dirty="0"/>
           </a:p>
@@ -7523,7 +7523,7 @@
                   <a:srgbClr val="1E2761"/>
                 </a:solidFill>
               </a:rPr>
-              <a:t>价值量化：人工跨平台尽调 2-4 小时 → 标小智 3 分钟 · 字段抽取 IoU 0.5339 · 无依据字段率 100%→0% · LLM 成本 ¥1.99/107 篇</a:t>
+              <a:t>价值量化：人工跨平台尽调 2-4 小时 → 标小智 3 分钟 · null_false_positive_rate=0.0 · 无依据字段率 100%→0% · 1316 测试通过 / 107 篇真实公告</a:t>
             </a:r>
           </a:p>
         </p:txBody>
@@ -8935,7 +8935,7 @@
                 <a:ea typeface="Calibri" pitchFamily="34" charset="-122"/>
                 <a:cs typeface="Calibri" pitchFamily="34" charset="-120"/>
               </a:rPr>
-              <a:t>IoU 边界质量评测 + A/B/C/D 四组消融实验（22 篇金标）</a:t>
+              <a:t>IoU 边界质量评测 + A/B/C/D 四组消融实验（107 篇真实公告）</a:t>
             </a:r>
             <a:endParaRPr lang="en-US" sz="1300" dirty="0"/>
           </a:p>
@@ -9044,7 +9044,7 @@
                 <a:ea typeface="Calibri" pitchFamily="34" charset="-122"/>
                 <a:cs typeface="Calibri" pitchFamily="34" charset="-120"/>
               </a:rPr>
-              <a:t>A(100%) → D(0%)</a:t>
+              <a:t>A(100%) → C(6.04%) → D(0%)</a:t>
             </a:r>
             <a:endParaRPr lang="en-US" sz="1400" dirty="0"/>
           </a:p>
@@ -9154,7 +9154,7 @@
                 <a:ea typeface="Calibri" pitchFamily="34" charset="-122"/>
                 <a:cs typeface="Calibri" pitchFamily="34" charset="-120"/>
               </a:rPr>
-              <a:t>04 · T4 BOQ 异常检测（实验性）</a:t>
+              <a:t>04 · T4 来源谱系与事实断言键</a:t>
             </a:r>
             <a:endParaRPr lang="en-US" sz="3200" dirty="0"/>
           </a:p>
@@ -9271,7 +9271,7 @@
                 <a:ea typeface="Calibri" pitchFamily="34" charset="-122"/>
                 <a:cs typeface="Calibri" pitchFamily="34" charset="-120"/>
               </a:rPr>
-              <a:t>32 类基准价格库识别报价偏离</a:t>
+              <a:t>区分官方原始/转载/商业转载/索引页面</a:t>
             </a:r>
             <a:endParaRPr lang="en-US" sz="1400" dirty="0"/>
           </a:p>
@@ -9349,7 +9349,7 @@
                 <a:ea typeface="Calibri" pitchFamily="34" charset="-122"/>
                 <a:cs typeface="Calibri" pitchFamily="34" charset="-120"/>
               </a:rPr>
-              <a:t>低价中标可能存在围标/劣质供货风险，难系统化识别</a:t>
+              <a:t>同一公告多平台转载，难区分独立交叉验证与同源转载</a:t>
             </a:r>
             <a:endParaRPr lang="en-US" sz="1300" dirty="0"/>
           </a:p>
@@ -9427,7 +9427,7 @@
                 <a:ea typeface="Calibri" pitchFamily="34" charset="-122"/>
                 <a:cs typeface="Calibri" pitchFamily="34" charset="-120"/>
               </a:rPr>
-              <a:t>32 类常见采购品类基准价格库（充电桩/服务器/电脑/交换机等）</a:t>
+              <a:t>来源角色判定：official_original/official_repost/commercial_repost/index_only</a:t>
             </a:r>
             <a:endParaRPr lang="en-US" sz="1300" dirty="0"/>
           </a:p>
@@ -9444,7 +9444,7 @@
                 <a:ea typeface="Calibri" pitchFamily="34" charset="-122"/>
                 <a:cs typeface="Calibri" pitchFamily="34" charset="-120"/>
               </a:rPr>
-              <a:t>正则提取"数量+单位+品名"和"品名+数量+单位"两种模式</a:t>
+              <a:t>同源转载识别：基于 simhash + 事实断言键避免误判</a:t>
             </a:r>
             <a:endParaRPr lang="en-US" sz="1300" dirty="0"/>
           </a:p>
@@ -9461,7 +9461,7 @@
                 <a:ea typeface="Calibri" pitchFamily="34" charset="-122"/>
                 <a:cs typeface="Calibri" pitchFamily="34" charset="-120"/>
               </a:rPr>
-              <a:t>按市场均价 ±std 判定 underpriced/overpriced/normal</a:t>
+              <a:t>事实断言键：确保跨源比较的是同一业务事实</a:t>
             </a:r>
             <a:endParaRPr lang="en-US" sz="1300" dirty="0"/>
           </a:p>
@@ -9531,7 +9531,7 @@
                 <a:ea typeface="Calibri" pitchFamily="34" charset="-122"/>
                 <a:cs typeface="Calibri" pitchFamily="34" charset="-120"/>
               </a:rPr>
-              <a:t>32 类</a:t>
+              <a:t>4 类</a:t>
             </a:r>
             <a:endParaRPr lang="en-US" sz="3200" dirty="0"/>
           </a:p>
@@ -9570,7 +9570,7 @@
                 <a:ea typeface="Calibri" pitchFamily="34" charset="-122"/>
                 <a:cs typeface="Calibri" pitchFamily="34" charset="-120"/>
               </a:rPr>
-              <a:t>基准价格品类</a:t>
+              <a:t>来源角色</a:t>
             </a:r>
             <a:endParaRPr lang="en-US" sz="1400" dirty="0"/>
           </a:p>
@@ -9609,7 +9609,7 @@
                 <a:ea typeface="Consolas" pitchFamily="34" charset="-122"/>
                 <a:cs typeface="Consolas" pitchFamily="34" charset="-120"/>
               </a:rPr>
-              <a:t>代码：app/processors/boq_engine.py</a:t>
+              <a:t>代码：app/processors/{source_lineage,repost_features,fact_assertion_key}.py</a:t>
             </a:r>
             <a:endParaRPr lang="en-US" sz="1100" dirty="0"/>
           </a:p>
@@ -9680,7 +9680,7 @@
                 <a:ea typeface="Calibri" pitchFamily="34" charset="-122"/>
                 <a:cs typeface="Calibri" pitchFamily="34" charset="-120"/>
               </a:rPr>
-              <a:t>04 · T5 废标风险预警 + 供应商公开活动观察度</a:t>
+              <a:t>04 · T5 选择性输出 + 域名级合规采集</a:t>
             </a:r>
             <a:endParaRPr lang="en-US" sz="3200" dirty="0"/>
           </a:p>
@@ -9797,7 +9797,7 @@
                 <a:ea typeface="Calibri" pitchFamily="34" charset="-122"/>
                 <a:cs typeface="Calibri" pitchFamily="34" charset="-120"/>
               </a:rPr>
-              <a:t>18 条规则 + 五维度加权（25/20/20/15/20）评分</a:t>
+              <a:t>display_grade high/review/low + 8 秒域名级频率限制</a:t>
             </a:r>
             <a:endParaRPr lang="en-US" sz="1400" dirty="0"/>
           </a:p>
@@ -9875,7 +9875,7 @@
                 <a:ea typeface="Calibri" pitchFamily="34" charset="-122"/>
                 <a:cs typeface="Calibri" pitchFamily="34" charset="-120"/>
               </a:rPr>
-              <a:t>废标风险难发现；供应商信用评估依赖人工经验</a:t>
+              <a:t>无依据字段需过滤；采集频率与 robots.txt 需合规</a:t>
             </a:r>
             <a:endParaRPr lang="en-US" sz="1300" dirty="0"/>
           </a:p>
@@ -9953,7 +9953,7 @@
                 <a:ea typeface="Calibri" pitchFamily="34" charset="-122"/>
                 <a:cs typeface="Calibri" pitchFamily="34" charset="-120"/>
               </a:rPr>
-              <a:t>废标风险预警：18 条规则覆盖排他性资质/付款风险/交货期/资质门槛，含否定语境检测</a:t>
+              <a:t>选择性输出：display_grade 基于 support_level+source_quality+cross_verify_status 三维生成 high/review/low</a:t>
             </a:r>
             <a:endParaRPr lang="en-US" sz="1300" dirty="0"/>
           </a:p>
@@ -9970,7 +9970,7 @@
                 <a:ea typeface="Calibri" pitchFamily="34" charset="-122"/>
                 <a:cs typeface="Calibri" pitchFamily="34" charset="-120"/>
               </a:rPr>
-              <a:t>供应商公开活动观察度：集中度 25% + 金额 20% + 频率 20% + 地域 15% + 采购人 20% 加权</a:t>
+              <a:t>域名级频率限制：DomainRateLimiter 按域名独立计数 8 秒间隔 + robots_checker 30 分钟缓存</a:t>
             </a:r>
             <a:endParaRPr lang="en-US" sz="1300" dirty="0"/>
           </a:p>
@@ -10040,7 +10040,7 @@
                 <a:ea typeface="Calibri" pitchFamily="34" charset="-122"/>
                 <a:cs typeface="Calibri" pitchFamily="34" charset="-120"/>
               </a:rPr>
-              <a:t>18 + 3</a:t>
+              <a:t>3 维</a:t>
             </a:r>
             <a:endParaRPr lang="en-US" sz="3200" dirty="0"/>
           </a:p>
@@ -10079,7 +10079,7 @@
                 <a:ea typeface="Calibri" pitchFamily="34" charset="-122"/>
                 <a:cs typeface="Calibri" pitchFamily="34" charset="-120"/>
               </a:rPr>
-              <a:t>规则 + 评分维度</a:t>
+              <a:t>质量维度</a:t>
             </a:r>
             <a:endParaRPr lang="en-US" sz="1400" dirty="0"/>
           </a:p>
@@ -10118,7 +10118,7 @@
                 <a:ea typeface="Consolas" pitchFamily="34" charset="-122"/>
                 <a:cs typeface="Consolas" pitchFamily="34" charset="-120"/>
               </a:rPr>
-              <a:t>代码：app/processors/{risk_engine,supplier_risk}.py</a:t>
+              <a:t>代码：app/eval/display_grade.py + app/core/{rate_limiter,robots_checker}.py</a:t>
             </a:r>
             <a:endParaRPr lang="en-US" sz="1100" dirty="0"/>
           </a:p>
@@ -11817,7 +11817,7 @@
                 <a:ea typeface="Calibri" pitchFamily="34" charset="-122"/>
                 <a:cs typeface="Calibri" pitchFamily="34" charset="-120"/>
               </a:rPr>
-              <a:t>826</a:t>
+              <a:t>1316</a:t>
             </a:r>
             <a:endParaRPr lang="en-US" sz="10000" dirty="0"/>
           </a:p>
@@ -12355,7 +12355,7 @@
                 <a:ea typeface="Calibri" pitchFamily="34" charset="-122"/>
                 <a:cs typeface="Calibri" pitchFamily="34" charset="-120"/>
               </a:rPr>
-              <a:t>bootstrap_ci 100% · extractor 100% · source_lineage 97%</a:t>
+              <a:t>bootstrap_ci 100% · extractor 100% · source_lineage 97% · null_false_positive_rate=0.0</a:t>
             </a:r>
             <a:endParaRPr lang="en-US" sz="1400" dirty="0"/>
           </a:p>
@@ -16046,7 +16046,7 @@
                 <a:ea typeface="Calibri" pitchFamily="34" charset="-122"/>
                 <a:cs typeface="Calibri" pitchFamily="34" charset="-120"/>
               </a:rPr>
-              <a:t>不接入央行征信</a:t>
+              <a:t>HMAC-SHA256+Argon2id+AES-GCM 凭证安全</a:t>
             </a:r>
             <a:endParaRPr lang="en-US" sz="1100" dirty="0"/>
           </a:p>
@@ -16388,7 +16388,7 @@
                 <a:ea typeface="Calibri" pitchFamily="34" charset="-122"/>
                 <a:cs typeface="Calibri" pitchFamily="34" charset="-120"/>
               </a:rPr>
-              <a:t>IoU 0.5339 边界质量</a:t>
+              <a:t>null_false_positive_rate=0.0</a:t>
             </a:r>
             <a:endParaRPr lang="en-US" sz="1100" dirty="0"/>
           </a:p>
@@ -16456,7 +16456,7 @@
                 <a:ea typeface="Calibri" pitchFamily="34" charset="-122"/>
                 <a:cs typeface="Calibri" pitchFamily="34" charset="-120"/>
               </a:rPr>
-              <a:t>unjustified ↓100%</a:t>
+              <a:t>unjustified 100% to 0%</a:t>
             </a:r>
             <a:endParaRPr lang="en-US" sz="1100" dirty="0"/>
           </a:p>
@@ -17197,7 +17197,7 @@
                 <a:ea typeface="Calibri" pitchFamily="34" charset="-122"/>
                 <a:cs typeface="Calibri" pitchFamily="34" charset="-120"/>
               </a:rPr>
-              <a:t>BOQ 基准价格库（实验性）</a:t>
+              <a:t>来源谱系追踪</a:t>
             </a:r>
             <a:endParaRPr lang="en-US" sz="1400" dirty="0"/>
           </a:p>
@@ -17236,7 +17236,7 @@
                 <a:ea typeface="Calibri" pitchFamily="34" charset="-122"/>
                 <a:cs typeface="Calibri" pitchFamily="34" charset="-120"/>
               </a:rPr>
-              <a:t>32 类采购品类 + ±std 预警</a:t>
+              <a:t>官方原始/转载/商业转载/索引判定</a:t>
             </a:r>
             <a:endParaRPr lang="en-US" sz="1100" dirty="0"/>
           </a:p>
@@ -17275,7 +17275,7 @@
                 <a:ea typeface="Consolas" pitchFamily="34" charset="-122"/>
                 <a:cs typeface="Consolas" pitchFamily="34" charset="-120"/>
               </a:rPr>
-              <a:t>app/processors/boq_engine.py</a:t>
+              <a:t>app/processors/source_lineage.py</a:t>
             </a:r>
             <a:endParaRPr lang="en-US" sz="1000" dirty="0"/>
           </a:p>
@@ -17610,7 +17610,7 @@
                 <a:ea typeface="Calibri" pitchFamily="34" charset="-122"/>
                 <a:cs typeface="Calibri" pitchFamily="34" charset="-120"/>
               </a:rPr>
-              <a:t>开源协议：Apache License 2.0 | GitHub 已公开，含完整安装文档 + 826 项测试用例 + 22 篇金标数据，可复现</a:t>
+              <a:t>开源协议：Apache License 2.0 | GitHub 已公开，含完整安装文档 + 1316 项测试用例 + 107 篇真实公告数据，可复现</a:t>
             </a:r>
             <a:endParaRPr lang="en-US" sz="1300" dirty="0"/>
           </a:p>
@@ -23967,7 +23967,7 @@
                 <a:ea typeface="Calibri" pitchFamily="34" charset="-122"/>
                 <a:cs typeface="Calibri" pitchFamily="34" charset="-120"/>
               </a:rPr>
-              <a:t>BOQ 报价异常检测（实验性）</a:t>
+              <a:t>5 级降级匹配引擎</a:t>
             </a:r>
             <a:endParaRPr lang="en-US" sz="1400" dirty="0"/>
           </a:p>
@@ -24006,7 +24006,7 @@
                 <a:ea typeface="Calibri" pitchFamily="34" charset="-122"/>
                 <a:cs typeface="Calibri" pitchFamily="34" charset="-120"/>
               </a:rPr>
-              <a:t>32 类基准价格库，识别围标/劣质供货</a:t>
+              <a:t>精确/空白/全半角/格式变体/模糊匹配</a:t>
             </a:r>
             <a:endParaRPr lang="en-US" sz="1200" dirty="0"/>
           </a:p>
@@ -24113,7 +24113,7 @@
                 <a:ea typeface="Calibri" pitchFamily="34" charset="-122"/>
                 <a:cs typeface="Calibri" pitchFamily="34" charset="-120"/>
               </a:rPr>
-              <a:t>废标风险预警</a:t>
+              <a:t>来源谱系追踪</a:t>
             </a:r>
             <a:endParaRPr lang="en-US" sz="1400" dirty="0"/>
           </a:p>
@@ -24152,7 +24152,7 @@
                 <a:ea typeface="Calibri" pitchFamily="34" charset="-122"/>
                 <a:cs typeface="Calibri" pitchFamily="34" charset="-120"/>
               </a:rPr>
-              <a:t>18 条规则扫描资质与条款隐患</a:t>
+              <a:t>区分官方原始/转载/商业转载/索引页面</a:t>
             </a:r>
             <a:endParaRPr lang="en-US" sz="1200" dirty="0"/>
           </a:p>
@@ -24259,7 +24259,7 @@
                 <a:ea typeface="Calibri" pitchFamily="34" charset="-122"/>
                 <a:cs typeface="Calibri" pitchFamily="34" charset="-120"/>
               </a:rPr>
-              <a:t>供应商公开活动观察度</a:t>
+              <a:t>选择性输出 + 凭证安全</a:t>
             </a:r>
             <a:endParaRPr lang="en-US" sz="1400" dirty="0"/>
           </a:p>
@@ -24298,7 +24298,7 @@
                 <a:ea typeface="Calibri" pitchFamily="34" charset="-122"/>
                 <a:cs typeface="Calibri" pitchFamily="34" charset="-120"/>
               </a:rPr>
-              <a:t>集中度/金额/频率/地域/采购人五维度加权</a:t>
+              <a:t>display_grade high/review/low + HMAC-SHA256+Argon2id+AES-GCM</a:t>
             </a:r>
             <a:endParaRPr lang="en-US" sz="1200" dirty="0"/>
           </a:p>
@@ -25293,7 +25293,7 @@
                 <a:ea typeface="Calibri" pitchFamily="34" charset="-122"/>
                 <a:cs typeface="Calibri" pitchFamily="34" charset="-120"/>
               </a:rPr>
-              <a:t>BOQ（实验性）+ 废标 + 公开活动观察度</a:t>
+              <a:t>六维公开活动观察信号，不输出信用评分</a:t>
             </a:r>
             <a:endParaRPr lang="en-US" sz="1200" dirty="0"/>
           </a:p>
